--- a/skills/presentation-template-library/skills/artifact-template-skyline-wayfinding/assets/reference.pptx
+++ b/skills/presentation-template-library/skills/artifact-template-skyline-wayfinding/assets/reference.pptx
@@ -729,7 +729,7 @@
           <p:nvPr/>
         </p:nvPicPr>
         <p:blipFill>
-          <a:blip xmlns:r="http://schemas.openxmlformats.org/officeDocument/2006/relationships" xmlns:a="http://schemas.openxmlformats.org/drawingml/2006/main" r:embed="rIdOfficeKitImagee4bd683f73b7a543_1"/>
+          <a:blip xmlns:r="http://schemas.openxmlformats.org/officeDocument/2006/relationships" xmlns:a="http://schemas.openxmlformats.org/drawingml/2006/main" r:embed="rIdOfficeKitImagec7b73f8fac405495_1"/>
           <a:srcRect xmlns:a="http://schemas.openxmlformats.org/drawingml/2006/main" l="0" t="34171" r="0" b="34171"/>
           <a:stretch xmlns:a="http://schemas.openxmlformats.org/drawingml/2006/main">
             <a:fillRect/>
@@ -2552,7 +2552,7 @@
         </p:xfrm>
         <a:graphic xmlns:a="http://schemas.openxmlformats.org/drawingml/2006/main">
           <a:graphicData uri="http://schemas.openxmlformats.org/drawingml/2006/chart">
-            <c:chart xmlns:r="http://schemas.openxmlformats.org/officeDocument/2006/relationships" xmlns:c="http://schemas.openxmlformats.org/drawingml/2006/chart" r:id="R81937ea46698471d"/>
+            <c:chart xmlns:r="http://schemas.openxmlformats.org/officeDocument/2006/relationships" xmlns:c="http://schemas.openxmlformats.org/drawingml/2006/chart" r:id="R40e365e563a542d5"/>
           </a:graphicData>
         </a:graphic>
       </p:graphicFrame>
@@ -2570,7 +2570,7 @@
         </p:xfrm>
         <a:graphic xmlns:a="http://schemas.openxmlformats.org/drawingml/2006/main">
           <a:graphicData uri="http://schemas.openxmlformats.org/drawingml/2006/chart">
-            <c:chart xmlns:r="http://schemas.openxmlformats.org/officeDocument/2006/relationships" xmlns:c="http://schemas.openxmlformats.org/drawingml/2006/chart" r:id="Rb58bd673ce344fbc"/>
+            <c:chart xmlns:r="http://schemas.openxmlformats.org/officeDocument/2006/relationships" xmlns:c="http://schemas.openxmlformats.org/drawingml/2006/chart" r:id="R79f5911cd4d54e3b"/>
           </a:graphicData>
         </a:graphic>
       </p:graphicFrame>
@@ -4056,7 +4056,7 @@
         </p:xfrm>
         <a:graphic xmlns:a="http://schemas.openxmlformats.org/drawingml/2006/main">
           <a:graphicData uri="http://schemas.openxmlformats.org/drawingml/2006/chart">
-            <c:chart xmlns:r="http://schemas.openxmlformats.org/officeDocument/2006/relationships" xmlns:c="http://schemas.openxmlformats.org/drawingml/2006/chart" r:id="R5148bd6add1d4094"/>
+            <c:chart xmlns:r="http://schemas.openxmlformats.org/officeDocument/2006/relationships" xmlns:c="http://schemas.openxmlformats.org/drawingml/2006/chart" r:id="R7be2789bccc64f21"/>
           </a:graphicData>
         </a:graphic>
       </p:graphicFrame>
@@ -4074,7 +4074,7 @@
         </p:xfrm>
         <a:graphic xmlns:a="http://schemas.openxmlformats.org/drawingml/2006/main">
           <a:graphicData uri="http://schemas.openxmlformats.org/drawingml/2006/chart">
-            <c:chart xmlns:r="http://schemas.openxmlformats.org/officeDocument/2006/relationships" xmlns:c="http://schemas.openxmlformats.org/drawingml/2006/chart" r:id="R127e924b970f4aa7"/>
+            <c:chart xmlns:r="http://schemas.openxmlformats.org/officeDocument/2006/relationships" xmlns:c="http://schemas.openxmlformats.org/drawingml/2006/chart" r:id="Rf5203aa7aa884886"/>
           </a:graphicData>
         </a:graphic>
       </p:graphicFrame>

--- a/skills/presentation-template-library/skills/artifact-template-skyline-wayfinding/assets/reference.pptx
+++ b/skills/presentation-template-library/skills/artifact-template-skyline-wayfinding/assets/reference.pptx
@@ -2552,7 +2552,7 @@
         </p:xfrm>
         <a:graphic xmlns:a="http://schemas.openxmlformats.org/drawingml/2006/main">
           <a:graphicData uri="http://schemas.openxmlformats.org/drawingml/2006/chart">
-            <c:chart xmlns:r="http://schemas.openxmlformats.org/officeDocument/2006/relationships" xmlns:c="http://schemas.openxmlformats.org/drawingml/2006/chart" r:id="R40e365e563a542d5"/>
+            <c:chart xmlns:r="http://schemas.openxmlformats.org/officeDocument/2006/relationships" xmlns:c="http://schemas.openxmlformats.org/drawingml/2006/chart" r:id="R011b76dbb3254f97"/>
           </a:graphicData>
         </a:graphic>
       </p:graphicFrame>
@@ -2570,7 +2570,7 @@
         </p:xfrm>
         <a:graphic xmlns:a="http://schemas.openxmlformats.org/drawingml/2006/main">
           <a:graphicData uri="http://schemas.openxmlformats.org/drawingml/2006/chart">
-            <c:chart xmlns:r="http://schemas.openxmlformats.org/officeDocument/2006/relationships" xmlns:c="http://schemas.openxmlformats.org/drawingml/2006/chart" r:id="R79f5911cd4d54e3b"/>
+            <c:chart xmlns:r="http://schemas.openxmlformats.org/officeDocument/2006/relationships" xmlns:c="http://schemas.openxmlformats.org/drawingml/2006/chart" r:id="R4b810955697b422b"/>
           </a:graphicData>
         </a:graphic>
       </p:graphicFrame>
@@ -4056,7 +4056,7 @@
         </p:xfrm>
         <a:graphic xmlns:a="http://schemas.openxmlformats.org/drawingml/2006/main">
           <a:graphicData uri="http://schemas.openxmlformats.org/drawingml/2006/chart">
-            <c:chart xmlns:r="http://schemas.openxmlformats.org/officeDocument/2006/relationships" xmlns:c="http://schemas.openxmlformats.org/drawingml/2006/chart" r:id="R7be2789bccc64f21"/>
+            <c:chart xmlns:r="http://schemas.openxmlformats.org/officeDocument/2006/relationships" xmlns:c="http://schemas.openxmlformats.org/drawingml/2006/chart" r:id="Re9f763d8ad3f4ba4"/>
           </a:graphicData>
         </a:graphic>
       </p:graphicFrame>
@@ -4074,7 +4074,7 @@
         </p:xfrm>
         <a:graphic xmlns:a="http://schemas.openxmlformats.org/drawingml/2006/main">
           <a:graphicData uri="http://schemas.openxmlformats.org/drawingml/2006/chart">
-            <c:chart xmlns:r="http://schemas.openxmlformats.org/officeDocument/2006/relationships" xmlns:c="http://schemas.openxmlformats.org/drawingml/2006/chart" r:id="Rf5203aa7aa884886"/>
+            <c:chart xmlns:r="http://schemas.openxmlformats.org/officeDocument/2006/relationships" xmlns:c="http://schemas.openxmlformats.org/drawingml/2006/chart" r:id="Rd50673aa2f1548fd"/>
           </a:graphicData>
         </a:graphic>
       </p:graphicFrame>

--- a/skills/presentation-template-library/skills/artifact-template-skyline-wayfinding/assets/reference.pptx
+++ b/skills/presentation-template-library/skills/artifact-template-skyline-wayfinding/assets/reference.pptx
@@ -702,6 +702,16 @@
 <file path=ppt/slides/slide1.xml><?xml version="1.0" encoding="utf-8"?>
 <p:sld xmlns:p="http://schemas.openxmlformats.org/presentationml/2006/main">
   <p:cSld name="Opening claim">
+    <p:bg>
+      <p:bgPr>
+        <a:blipFill xmlns:a="http://schemas.openxmlformats.org/drawingml/2006/main">
+          <a:blip xmlns:r="http://schemas.openxmlformats.org/officeDocument/2006/relationships" r:embed="rIdOfficeKitImagec7b73f8fac405495_1"/>
+          <a:stretch>
+            <a:fillRect/>
+          </a:stretch>
+        </a:blipFill>
+      </p:bgPr>
+    </p:bg>
     <p:spTree>
       <p:nvGrpSpPr>
         <p:cNvPr id="1" name=""/>
@@ -716,38 +726,9 @@
           <a:chExt cx="0" cy="0"/>
         </a:xfrm>
       </p:grpSpPr>
-      <p:pic>
-        <p:nvPicPr>
-          <p:cNvPr id="2" name="artifact-template-skyline-wayfinding-cover-field">
-            <a:extLst xmlns:a="http://schemas.openxmlformats.org/drawingml/2006/main">
-              <a:ext uri="{C183D7F6-B498-43B3-948B-1728B52AA6E4}">
-                <adec:decorative xmlns:adec="http://schemas.microsoft.com/office/drawing/2017/decorative" val="1"/>
-              </a:ext>
-            </a:extLst>
-          </p:cNvPr>
-          <p:cNvPicPr/>
-          <p:nvPr/>
-        </p:nvPicPr>
-        <p:blipFill>
-          <a:blip xmlns:r="http://schemas.openxmlformats.org/officeDocument/2006/relationships" xmlns:a="http://schemas.openxmlformats.org/drawingml/2006/main" r:embed="rIdOfficeKitImagec7b73f8fac405495_1"/>
-          <a:srcRect xmlns:a="http://schemas.openxmlformats.org/drawingml/2006/main" l="0" t="34171" r="0" b="34171"/>
-          <a:stretch xmlns:a="http://schemas.openxmlformats.org/drawingml/2006/main">
-            <a:fillRect/>
-          </a:stretch>
-        </p:blipFill>
-        <p:spPr>
-          <a:xfrm xmlns:a="http://schemas.openxmlformats.org/drawingml/2006/main">
-            <a:off x="0" y="0"/>
-            <a:ext cx="15240000" cy="8572500"/>
-          </a:xfrm>
-          <a:prstGeom xmlns:a="http://schemas.openxmlformats.org/drawingml/2006/main" prst="rect">
-            <a:avLst/>
-          </a:prstGeom>
-        </p:spPr>
-      </p:pic>
-      <p:sp>
-        <p:nvSpPr>
-          <p:cNvPr id="3" name="cover-paper-scrim"/>
+      <p:sp>
+        <p:nvSpPr>
+          <p:cNvPr id="2" name="cover-paper-scrim"/>
           <p:cNvSpPr/>
           <p:nvPr/>
         </p:nvSpPr>
@@ -785,7 +766,7 @@
       </p:sp>
       <p:sp>
         <p:nvSpPr>
-          <p:cNvPr id="4" name="top-rule"/>
+          <p:cNvPr id="3" name="top-rule"/>
           <p:cNvSpPr/>
           <p:nvPr/>
         </p:nvSpPr>
@@ -819,7 +800,7 @@
       </p:sp>
       <p:sp>
         <p:nvSpPr>
-          <p:cNvPr id="5" name="eyebrow"/>
+          <p:cNvPr id="4" name="eyebrow"/>
           <p:cNvSpPr txBox="1"/>
           <p:nvPr/>
         </p:nvSpPr>
@@ -856,7 +837,7 @@
       </p:sp>
       <p:sp>
         <p:nvSpPr>
-          <p:cNvPr id="6" name="cover-title"/>
+          <p:cNvPr id="5" name="cover-title"/>
           <p:cNvSpPr txBox="1"/>
           <p:nvPr/>
         </p:nvSpPr>
@@ -893,7 +874,7 @@
       </p:sp>
       <p:sp>
         <p:nvSpPr>
-          <p:cNvPr id="7" name="cover-subtitle"/>
+          <p:cNvPr id="6" name="cover-subtitle"/>
           <p:cNvSpPr txBox="1"/>
           <p:nvPr/>
         </p:nvSpPr>
@@ -930,7 +911,7 @@
       </p:sp>
       <p:sp>
         <p:nvSpPr>
-          <p:cNvPr id="8" name="cover-rule"/>
+          <p:cNvPr id="7" name="cover-rule"/>
           <p:cNvSpPr/>
           <p:nvPr/>
         </p:nvSpPr>
@@ -964,7 +945,7 @@
       </p:sp>
       <p:sp>
         <p:nvSpPr>
-          <p:cNvPr id="9" name="cover-basis"/>
+          <p:cNvPr id="8" name="cover-basis"/>
           <p:cNvSpPr txBox="1"/>
           <p:nvPr/>
         </p:nvSpPr>
@@ -1001,7 +982,7 @@
       </p:sp>
       <p:sp>
         <p:nvSpPr>
-          <p:cNvPr id="10" name="cover-thesis"/>
+          <p:cNvPr id="9" name="cover-thesis"/>
           <p:cNvSpPr txBox="1"/>
           <p:nvPr/>
         </p:nvSpPr>
@@ -1038,7 +1019,7 @@
       </p:sp>
       <p:sp>
         <p:nvSpPr>
-          <p:cNvPr id="11" name="cover-source"/>
+          <p:cNvPr id="10" name="cover-source"/>
           <p:cNvSpPr txBox="1"/>
           <p:nvPr/>
         </p:nvSpPr>
@@ -1075,7 +1056,7 @@
       </p:sp>
       <p:sp>
         <p:nvSpPr>
-          <p:cNvPr id="12" name="page-number"/>
+          <p:cNvPr id="11" name="page-number"/>
           <p:cNvSpPr txBox="1"/>
           <p:nvPr/>
         </p:nvSpPr>
@@ -1113,7 +1094,7 @@
       </p:sp>
       <p:sp>
         <p:nvSpPr>
-          <p:cNvPr id="13" name="anchor-field"/>
+          <p:cNvPr id="12" name="anchor-field"/>
           <p:cNvSpPr/>
           <p:nvPr/>
         </p:nvSpPr>
@@ -1149,7 +1130,7 @@
       </p:sp>
       <p:sp>
         <p:nvSpPr>
-          <p:cNvPr id="14" name="anchor-grid-0-0"/>
+          <p:cNvPr id="13" name="anchor-grid-0-0"/>
           <p:cNvSpPr/>
           <p:nvPr/>
         </p:nvSpPr>
@@ -1185,7 +1166,7 @@
       </p:sp>
       <p:sp>
         <p:nvSpPr>
-          <p:cNvPr id="15" name="anchor-grid-0-1"/>
+          <p:cNvPr id="14" name="anchor-grid-0-1"/>
           <p:cNvSpPr/>
           <p:nvPr/>
         </p:nvSpPr>
@@ -1221,7 +1202,7 @@
       </p:sp>
       <p:sp>
         <p:nvSpPr>
-          <p:cNvPr id="16" name="anchor-grid-0-2"/>
+          <p:cNvPr id="15" name="anchor-grid-0-2"/>
           <p:cNvSpPr/>
           <p:nvPr/>
         </p:nvSpPr>
@@ -1257,7 +1238,7 @@
       </p:sp>
       <p:sp>
         <p:nvSpPr>
-          <p:cNvPr id="17" name="anchor-grid-1-0"/>
+          <p:cNvPr id="16" name="anchor-grid-1-0"/>
           <p:cNvSpPr/>
           <p:nvPr/>
         </p:nvSpPr>
@@ -1293,7 +1274,7 @@
       </p:sp>
       <p:sp>
         <p:nvSpPr>
-          <p:cNvPr id="18" name="anchor-grid-1-1"/>
+          <p:cNvPr id="17" name="anchor-grid-1-1"/>
           <p:cNvSpPr/>
           <p:nvPr/>
         </p:nvSpPr>
@@ -1329,7 +1310,7 @@
       </p:sp>
       <p:sp>
         <p:nvSpPr>
-          <p:cNvPr id="19" name="anchor-grid-1-2"/>
+          <p:cNvPr id="18" name="anchor-grid-1-2"/>
           <p:cNvSpPr/>
           <p:nvPr/>
         </p:nvSpPr>
@@ -1365,7 +1346,7 @@
       </p:sp>
       <p:sp>
         <p:nvSpPr>
-          <p:cNvPr id="20" name="anchor-grid-2-0"/>
+          <p:cNvPr id="19" name="anchor-grid-2-0"/>
           <p:cNvSpPr/>
           <p:nvPr/>
         </p:nvSpPr>
@@ -1401,7 +1382,7 @@
       </p:sp>
       <p:sp>
         <p:nvSpPr>
-          <p:cNvPr id="21" name="anchor-grid-2-1"/>
+          <p:cNvPr id="20" name="anchor-grid-2-1"/>
           <p:cNvSpPr/>
           <p:nvPr/>
         </p:nvSpPr>
@@ -1437,7 +1418,7 @@
       </p:sp>
       <p:sp>
         <p:nvSpPr>
-          <p:cNvPr id="22" name="anchor-grid-2-2"/>
+          <p:cNvPr id="21" name="anchor-grid-2-2"/>
           <p:cNvSpPr/>
           <p:nvPr/>
         </p:nvSpPr>
@@ -1473,7 +1454,7 @@
       </p:sp>
       <p:sp>
         <p:nvSpPr>
-          <p:cNvPr id="23" name="anchor-axis"/>
+          <p:cNvPr id="22" name="anchor-axis"/>
           <p:cNvSpPr/>
           <p:nvPr/>
         </p:nvSpPr>
@@ -2552,7 +2533,7 @@
         </p:xfrm>
         <a:graphic xmlns:a="http://schemas.openxmlformats.org/drawingml/2006/main">
           <a:graphicData uri="http://schemas.openxmlformats.org/drawingml/2006/chart">
-            <c:chart xmlns:r="http://schemas.openxmlformats.org/officeDocument/2006/relationships" xmlns:c="http://schemas.openxmlformats.org/drawingml/2006/chart" r:id="R011b76dbb3254f97"/>
+            <c:chart xmlns:r="http://schemas.openxmlformats.org/officeDocument/2006/relationships" xmlns:c="http://schemas.openxmlformats.org/drawingml/2006/chart" r:id="Rb7ae9ef80f4844e8"/>
           </a:graphicData>
         </a:graphic>
       </p:graphicFrame>
@@ -2570,7 +2551,7 @@
         </p:xfrm>
         <a:graphic xmlns:a="http://schemas.openxmlformats.org/drawingml/2006/main">
           <a:graphicData uri="http://schemas.openxmlformats.org/drawingml/2006/chart">
-            <c:chart xmlns:r="http://schemas.openxmlformats.org/officeDocument/2006/relationships" xmlns:c="http://schemas.openxmlformats.org/drawingml/2006/chart" r:id="R4b810955697b422b"/>
+            <c:chart xmlns:r="http://schemas.openxmlformats.org/officeDocument/2006/relationships" xmlns:c="http://schemas.openxmlformats.org/drawingml/2006/chart" r:id="Rad2536057be04246"/>
           </a:graphicData>
         </a:graphic>
       </p:graphicFrame>
@@ -4056,7 +4037,7 @@
         </p:xfrm>
         <a:graphic xmlns:a="http://schemas.openxmlformats.org/drawingml/2006/main">
           <a:graphicData uri="http://schemas.openxmlformats.org/drawingml/2006/chart">
-            <c:chart xmlns:r="http://schemas.openxmlformats.org/officeDocument/2006/relationships" xmlns:c="http://schemas.openxmlformats.org/drawingml/2006/chart" r:id="Re9f763d8ad3f4ba4"/>
+            <c:chart xmlns:r="http://schemas.openxmlformats.org/officeDocument/2006/relationships" xmlns:c="http://schemas.openxmlformats.org/drawingml/2006/chart" r:id="R8d368eceb8f94da1"/>
           </a:graphicData>
         </a:graphic>
       </p:graphicFrame>
@@ -4074,7 +4055,7 @@
         </p:xfrm>
         <a:graphic xmlns:a="http://schemas.openxmlformats.org/drawingml/2006/main">
           <a:graphicData uri="http://schemas.openxmlformats.org/drawingml/2006/chart">
-            <c:chart xmlns:r="http://schemas.openxmlformats.org/officeDocument/2006/relationships" xmlns:c="http://schemas.openxmlformats.org/drawingml/2006/chart" r:id="Rd50673aa2f1548fd"/>
+            <c:chart xmlns:r="http://schemas.openxmlformats.org/officeDocument/2006/relationships" xmlns:c="http://schemas.openxmlformats.org/drawingml/2006/chart" r:id="R3938096fc3d241da"/>
           </a:graphicData>
         </a:graphic>
       </p:graphicFrame>

--- a/skills/presentation-template-library/skills/artifact-template-skyline-wayfinding/assets/reference.pptx
+++ b/skills/presentation-template-library/skills/artifact-template-skyline-wayfinding/assets/reference.pptx
@@ -478,234 +478,13 @@
 </c:chartSpace>
 </file>
 
-<file path=ppt/slides/charts/chart3.xml><?xml version="1.0" encoding="utf-8"?>
-<c:chartSpace xmlns:c="http://schemas.openxmlformats.org/drawingml/2006/chart" xmlns:a="http://schemas.openxmlformats.org/drawingml/2006/main">
-  <c:chart>
-    <c:title>
-      <c:tx>
-        <c:rich>
-          <a:bodyPr/>
-          <a:lstStyle/>
-          <a:p>
-            <a:r>
-              <a:t>Observed signal</a:t>
-            </a:r>
-          </a:p>
-        </c:rich>
-      </c:tx>
-      <c:layout/>
-    </c:title>
-    <c:plotArea>
-      <c:layout/>
-      <c:barChart>
-        <c:barDir val="col"/>
-        <c:grouping val="clustered"/>
-        <c:ser>
-          <c:idx val="0"/>
-          <c:order val="0"/>
-          <c:tx>
-            <c:v>Observed</c:v>
-          </c:tx>
-          <c:spPr>
-            <a:solidFill>
-              <a:srgbClr val="4C9DD8"/>
-            </a:solidFill>
-          </c:spPr>
-          <c:cat>
-            <c:strLit>
-              <c:ptCount val="6"/>
-              <c:pt idx="0">
-                <c:v>A</c:v>
-              </c:pt>
-              <c:pt idx="1">
-                <c:v>B</c:v>
-              </c:pt>
-              <c:pt idx="2">
-                <c:v>C</c:v>
-              </c:pt>
-              <c:pt idx="3">
-                <c:v>D</c:v>
-              </c:pt>
-              <c:pt idx="4">
-                <c:v>E</c:v>
-              </c:pt>
-              <c:pt idx="5">
-                <c:v>F</c:v>
-              </c:pt>
-            </c:strLit>
-          </c:cat>
-          <c:val>
-            <c:numLit>
-              <c:formatCode>General</c:formatCode>
-              <c:ptCount val="6"/>
-              <c:pt idx="0">
-                <c:v>38</c:v>
-              </c:pt>
-              <c:pt idx="1">
-                <c:v>46</c:v>
-              </c:pt>
-              <c:pt idx="2">
-                <c:v>43</c:v>
-              </c:pt>
-              <c:pt idx="3">
-                <c:v>58</c:v>
-              </c:pt>
-              <c:pt idx="4">
-                <c:v>68</c:v>
-              </c:pt>
-              <c:pt idx="5">
-                <c:v>74</c:v>
-              </c:pt>
-            </c:numLit>
-          </c:val>
-        </c:ser>
-        <c:axId val="1"/>
-        <c:axId val="2"/>
-      </c:barChart>
-      <c:catAx>
-        <c:axId val="1"/>
-        <c:scaling>
-          <c:orientation val="minMax"/>
-        </c:scaling>
-        <c:axPos val="b"/>
-        <c:crossAx val="2"/>
-      </c:catAx>
-      <c:valAx>
-        <c:axId val="2"/>
-        <c:scaling>
-          <c:orientation val="minMax"/>
-        </c:scaling>
-        <c:axPos val="l"/>
-        <c:crossAx val="1"/>
-      </c:valAx>
-    </c:plotArea>
-    <c:plotVisOnly val="1"/>
-  </c:chart>
-</c:chartSpace>
-</file>
-
-<file path=ppt/slides/charts/chart4.xml><?xml version="1.0" encoding="utf-8"?>
-<c:chartSpace xmlns:c="http://schemas.openxmlformats.org/drawingml/2006/chart" xmlns:a="http://schemas.openxmlformats.org/drawingml/2006/main">
-  <c:chart>
-    <c:title>
-      <c:tx>
-        <c:rich>
-          <a:bodyPr/>
-          <a:lstStyle/>
-          <a:p>
-            <a:r>
-              <a:t>Context</a:t>
-            </a:r>
-          </a:p>
-        </c:rich>
-      </c:tx>
-      <c:layout/>
-    </c:title>
-    <c:plotArea>
-      <c:layout/>
-      <c:lineChart>
-        <c:grouping val="standard"/>
-        <c:ser>
-          <c:idx val="0"/>
-          <c:order val="0"/>
-          <c:tx>
-            <c:v>Context</c:v>
-          </c:tx>
-          <c:spPr>
-            <a:solidFill>
-              <a:srgbClr val="EE9A3D"/>
-            </a:solidFill>
-            <a:ln w="38100">
-              <a:solidFill>
-                <a:srgbClr val="EE9A3D"/>
-              </a:solidFill>
-              <a:prstDash val="solid"/>
-            </a:ln>
-          </c:spPr>
-          <c:marker>
-            <c:symbol val="circle"/>
-            <c:size val="6"/>
-          </c:marker>
-          <c:cat>
-            <c:strLit>
-              <c:ptCount val="6"/>
-              <c:pt idx="0">
-                <c:v>A</c:v>
-              </c:pt>
-              <c:pt idx="1">
-                <c:v>B</c:v>
-              </c:pt>
-              <c:pt idx="2">
-                <c:v>C</c:v>
-              </c:pt>
-              <c:pt idx="3">
-                <c:v>D</c:v>
-              </c:pt>
-              <c:pt idx="4">
-                <c:v>E</c:v>
-              </c:pt>
-              <c:pt idx="5">
-                <c:v>F</c:v>
-              </c:pt>
-            </c:strLit>
-          </c:cat>
-          <c:val>
-            <c:numLit>
-              <c:formatCode>General</c:formatCode>
-              <c:ptCount val="6"/>
-              <c:pt idx="0">
-                <c:v>34</c:v>
-              </c:pt>
-              <c:pt idx="1">
-                <c:v>39</c:v>
-              </c:pt>
-              <c:pt idx="2">
-                <c:v>41</c:v>
-              </c:pt>
-              <c:pt idx="3">
-                <c:v>45</c:v>
-              </c:pt>
-              <c:pt idx="4">
-                <c:v>49</c:v>
-              </c:pt>
-              <c:pt idx="5">
-                <c:v>52</c:v>
-              </c:pt>
-            </c:numLit>
-          </c:val>
-        </c:ser>
-        <c:axId val="1"/>
-        <c:axId val="2"/>
-      </c:lineChart>
-      <c:catAx>
-        <c:axId val="1"/>
-        <c:scaling>
-          <c:orientation val="minMax"/>
-        </c:scaling>
-        <c:axPos val="b"/>
-        <c:crossAx val="2"/>
-      </c:catAx>
-      <c:valAx>
-        <c:axId val="2"/>
-        <c:scaling>
-          <c:orientation val="minMax"/>
-        </c:scaling>
-        <c:axPos val="l"/>
-        <c:crossAx val="1"/>
-      </c:valAx>
-    </c:plotArea>
-    <c:plotVisOnly val="1"/>
-  </c:chart>
-</c:chartSpace>
-</file>
-
 <file path=ppt/slides/slide1.xml><?xml version="1.0" encoding="utf-8"?>
 <p:sld xmlns:p="http://schemas.openxmlformats.org/presentationml/2006/main">
   <p:cSld name="Opening claim">
     <p:bg>
       <p:bgPr>
         <a:blipFill xmlns:a="http://schemas.openxmlformats.org/drawingml/2006/main">
-          <a:blip xmlns:r="http://schemas.openxmlformats.org/officeDocument/2006/relationships" r:embed="rIdOfficeKitImagec7b73f8fac405495_1"/>
+          <a:blip xmlns:r="http://schemas.openxmlformats.org/officeDocument/2006/relationships" r:embed="rIdOfficeKitImaged71bfa074cda59bb_1"/>
           <a:stretch>
             <a:fillRect/>
           </a:stretch>
@@ -2533,7 +2312,7 @@
         </p:xfrm>
         <a:graphic xmlns:a="http://schemas.openxmlformats.org/drawingml/2006/main">
           <a:graphicData uri="http://schemas.openxmlformats.org/drawingml/2006/chart">
-            <c:chart xmlns:r="http://schemas.openxmlformats.org/officeDocument/2006/relationships" xmlns:c="http://schemas.openxmlformats.org/drawingml/2006/chart" r:id="Rb7ae9ef80f4844e8"/>
+            <c:chart xmlns:r="http://schemas.openxmlformats.org/officeDocument/2006/relationships" xmlns:c="http://schemas.openxmlformats.org/drawingml/2006/chart" r:id="Rbf733aa70cd14dee"/>
           </a:graphicData>
         </a:graphic>
       </p:graphicFrame>
@@ -2551,7 +2330,7 @@
         </p:xfrm>
         <a:graphic xmlns:a="http://schemas.openxmlformats.org/drawingml/2006/main">
           <a:graphicData uri="http://schemas.openxmlformats.org/drawingml/2006/chart">
-            <c:chart xmlns:r="http://schemas.openxmlformats.org/officeDocument/2006/relationships" xmlns:c="http://schemas.openxmlformats.org/drawingml/2006/chart" r:id="Rad2536057be04246"/>
+            <c:chart xmlns:r="http://schemas.openxmlformats.org/officeDocument/2006/relationships" xmlns:c="http://schemas.openxmlformats.org/drawingml/2006/chart" r:id="R38436ff0be83469c"/>
           </a:graphicData>
         </a:graphic>
       </p:graphicFrame>
@@ -3794,6 +3573,16 @@
 <file path=ppt/slides/slide5.xml><?xml version="1.0" encoding="utf-8"?>
 <p:sld xmlns:p="http://schemas.openxmlformats.org/presentationml/2006/main">
   <p:cSld name="Visual carrier">
+    <p:bg>
+      <p:bgPr>
+        <a:blipFill xmlns:a="http://schemas.openxmlformats.org/drawingml/2006/main">
+          <a:blip xmlns:r="http://schemas.openxmlformats.org/officeDocument/2006/relationships" r:embed="rIdOfficeKitImage33b8c33a8fc3d613_1"/>
+          <a:stretch>
+            <a:fillRect/>
+          </a:stretch>
+        </a:blipFill>
+      </p:bgPr>
+    </p:bg>
     <p:spTree>
       <p:nvGrpSpPr>
         <p:cNvPr id="1" name=""/>
@@ -3810,20 +3599,22 @@
       </p:grpSpPr>
       <p:sp>
         <p:nvSpPr>
-          <p:cNvPr id="2" name="background"/>
+          <p:cNvPr id="2" name="section-reading-plane"/>
           <p:cNvSpPr/>
           <p:nvPr/>
         </p:nvSpPr>
         <p:spPr>
           <a:xfrm xmlns:a="http://schemas.openxmlformats.org/drawingml/2006/main">
             <a:off x="0" y="0"/>
-            <a:ext cx="15240000" cy="8572500"/>
+            <a:ext cx="7810500" cy="8572500"/>
           </a:xfrm>
           <a:prstGeom xmlns:a="http://schemas.openxmlformats.org/drawingml/2006/main" prst="rect">
             <a:avLst/>
           </a:prstGeom>
           <a:solidFill xmlns:a="http://schemas.openxmlformats.org/drawingml/2006/main">
-            <a:srgbClr val="F8FAFC"/>
+            <a:srgbClr val="F8FAFC">
+              <a:alpha val="94000"/>
+            </a:srgbClr>
           </a:solidFill>
           <a:ln xmlns:a="http://schemas.openxmlformats.org/drawingml/2006/main" w="0">
             <a:solidFill>
@@ -3846,14 +3637,88 @@
       </p:sp>
       <p:sp>
         <p:nvSpPr>
-          <p:cNvPr id="3" name="visual-top-rule"/>
+          <p:cNvPr id="3" name="section-eyebrow"/>
+          <p:cNvSpPr txBox="1"/>
+          <p:nvPr/>
+        </p:nvSpPr>
+        <p:spPr>
+          <a:xfrm xmlns:a="http://schemas.openxmlformats.org/drawingml/2006/main">
+            <a:off x="914400" y="914400"/>
+            <a:ext cx="6096000" cy="228600"/>
+          </a:xfrm>
+          <a:prstGeom xmlns:a="http://schemas.openxmlformats.org/drawingml/2006/main" prst="rect">
+            <a:avLst/>
+          </a:prstGeom>
+          <a:noFill xmlns:a="http://schemas.openxmlformats.org/drawingml/2006/main"/>
+          <a:ln xmlns:a="http://schemas.openxmlformats.org/drawingml/2006/main" w="0">
+            <a:noFill/>
+          </a:ln>
+        </p:spPr>
+        <p:txBody>
+          <a:bodyPr xmlns:a="http://schemas.openxmlformats.org/drawingml/2006/main" wrap="square" lIns="0" tIns="0" rIns="0" bIns="0" anchor="t"/>
+          <a:lstStyle xmlns:a="http://schemas.openxmlformats.org/drawingml/2006/main"/>
+          <a:p xmlns:a="http://schemas.openxmlformats.org/drawingml/2006/main">
+            <a:r>
+              <a:rPr lang="en-US" sz="1200" b="1">
+                <a:solidFill>
+                  <a:srgbClr val="4C9DD8"/>
+                </a:solidFill>
+                <a:latin typeface="Arial"/>
+                <a:ea typeface="Arial"/>
+              </a:rPr>
+              <a:t>SKYLINE WAYFINDING · SECTION</a:t>
+            </a:r>
+            <a:endParaRPr lang="en-US"/>
+          </a:p>
+        </p:txBody>
+      </p:sp>
+      <p:sp>
+        <p:nvSpPr>
+          <p:cNvPr id="4" name="section-title"/>
+          <p:cNvSpPr txBox="1"/>
+          <p:nvPr/>
+        </p:nvSpPr>
+        <p:spPr>
+          <a:xfrm xmlns:a="http://schemas.openxmlformats.org/drawingml/2006/main">
+            <a:off x="914400" y="1657350"/>
+            <a:ext cx="5905500" cy="1162050"/>
+          </a:xfrm>
+          <a:prstGeom xmlns:a="http://schemas.openxmlformats.org/drawingml/2006/main" prst="rect">
+            <a:avLst/>
+          </a:prstGeom>
+          <a:noFill xmlns:a="http://schemas.openxmlformats.org/drawingml/2006/main"/>
+          <a:ln xmlns:a="http://schemas.openxmlformats.org/drawingml/2006/main" w="0">
+            <a:noFill/>
+          </a:ln>
+        </p:spPr>
+        <p:txBody>
+          <a:bodyPr xmlns:a="http://schemas.openxmlformats.org/drawingml/2006/main" wrap="square" lIns="0" tIns="0" rIns="0" bIns="0" anchor="t"/>
+          <a:lstStyle xmlns:a="http://schemas.openxmlformats.org/drawingml/2006/main"/>
+          <a:p xmlns:a="http://schemas.openxmlformats.org/drawingml/2006/main">
+            <a:r>
+              <a:rPr lang="en-US" sz="3450" b="1">
+                <a:solidFill>
+                  <a:srgbClr val="162A4A"/>
+                </a:solidFill>
+                <a:latin typeface="Arial"/>
+                <a:ea typeface="Arial"/>
+              </a:rPr>
+              <a:t>Show the operating shape</a:t>
+            </a:r>
+            <a:endParaRPr lang="en-US"/>
+          </a:p>
+        </p:txBody>
+      </p:sp>
+      <p:sp>
+        <p:nvSpPr>
+          <p:cNvPr id="5" name="section-rule"/>
           <p:cNvSpPr/>
           <p:nvPr/>
         </p:nvSpPr>
         <p:spPr>
           <a:xfrm xmlns:a="http://schemas.openxmlformats.org/drawingml/2006/main">
-            <a:off x="838200" y="666750"/>
-            <a:ext cx="13563600" cy="0"/>
+            <a:off x="914400" y="3181350"/>
+            <a:ext cx="4991100" cy="0"/>
           </a:xfrm>
           <a:prstGeom xmlns:a="http://schemas.openxmlformats.org/drawingml/2006/main" prst="line">
             <a:avLst/>
@@ -3880,335 +3745,118 @@
       </p:sp>
       <p:sp>
         <p:nvSpPr>
-          <p:cNvPr id="4" name="SKYLINE WAYFINDING · VISUAL CARRIER"/>
-          <p:cNvSpPr txBox="1"/>
-          <p:nvPr/>
-        </p:nvSpPr>
-        <p:spPr>
-          <a:xfrm xmlns:a="http://schemas.openxmlformats.org/drawingml/2006/main">
-            <a:off x="914400" y="895350"/>
-            <a:ext cx="7239000" cy="228600"/>
-          </a:xfrm>
-          <a:prstGeom xmlns:a="http://schemas.openxmlformats.org/drawingml/2006/main" prst="rect">
-            <a:avLst/>
-          </a:prstGeom>
-          <a:noFill xmlns:a="http://schemas.openxmlformats.org/drawingml/2006/main"/>
-          <a:ln xmlns:a="http://schemas.openxmlformats.org/drawingml/2006/main" w="0">
-            <a:noFill/>
-          </a:ln>
-        </p:spPr>
-        <p:txBody>
-          <a:bodyPr xmlns:a="http://schemas.openxmlformats.org/drawingml/2006/main" wrap="square" lIns="0" tIns="0" rIns="0" bIns="0" anchor="t"/>
-          <a:lstStyle xmlns:a="http://schemas.openxmlformats.org/drawingml/2006/main"/>
-          <a:p xmlns:a="http://schemas.openxmlformats.org/drawingml/2006/main">
-            <a:r>
-              <a:rPr lang="en-US" sz="1200" b="1">
+          <p:cNvPr id="6" name="section-body"/>
+          <p:cNvSpPr txBox="1"/>
+          <p:nvPr/>
+        </p:nvSpPr>
+        <p:spPr>
+          <a:xfrm xmlns:a="http://schemas.openxmlformats.org/drawingml/2006/main">
+            <a:off x="914400" y="3600450"/>
+            <a:ext cx="5334000" cy="819150"/>
+          </a:xfrm>
+          <a:prstGeom xmlns:a="http://schemas.openxmlformats.org/drawingml/2006/main" prst="rect">
+            <a:avLst/>
+          </a:prstGeom>
+          <a:noFill xmlns:a="http://schemas.openxmlformats.org/drawingml/2006/main"/>
+          <a:ln xmlns:a="http://schemas.openxmlformats.org/drawingml/2006/main" w="0">
+            <a:noFill/>
+          </a:ln>
+        </p:spPr>
+        <p:txBody>
+          <a:bodyPr xmlns:a="http://schemas.openxmlformats.org/drawingml/2006/main" wrap="square" lIns="0" tIns="0" rIns="0" bIns="0" anchor="t"/>
+          <a:lstStyle xmlns:a="http://schemas.openxmlformats.org/drawingml/2006/main"/>
+          <a:p xmlns:a="http://schemas.openxmlformats.org/drawingml/2006/main">
+            <a:r>
+              <a:rPr lang="en-US" sz="1800">
+                <a:solidFill>
+                  <a:srgbClr val="162A4A"/>
+                </a:solidFill>
+                <a:latin typeface="Arial"/>
+                <a:ea typeface="Arial"/>
+              </a:rPr>
+              <a:t>An operating page should reveal the shape of the work, not decorate the status.</a:t>
+            </a:r>
+            <a:endParaRPr lang="en-US"/>
+          </a:p>
+        </p:txBody>
+      </p:sp>
+      <p:sp>
+        <p:nvSpPr>
+          <p:cNvPr id="7" name="section-note"/>
+          <p:cNvSpPr txBox="1"/>
+          <p:nvPr/>
+        </p:nvSpPr>
+        <p:spPr>
+          <a:xfrm xmlns:a="http://schemas.openxmlformats.org/drawingml/2006/main">
+            <a:off x="914400" y="5238750"/>
+            <a:ext cx="5334000" cy="228600"/>
+          </a:xfrm>
+          <a:prstGeom xmlns:a="http://schemas.openxmlformats.org/drawingml/2006/main" prst="rect">
+            <a:avLst/>
+          </a:prstGeom>
+          <a:noFill xmlns:a="http://schemas.openxmlformats.org/drawingml/2006/main"/>
+          <a:ln xmlns:a="http://schemas.openxmlformats.org/drawingml/2006/main" w="0">
+            <a:noFill/>
+          </a:ln>
+        </p:spPr>
+        <p:txBody>
+          <a:bodyPr xmlns:a="http://schemas.openxmlformats.org/drawingml/2006/main" wrap="square" lIns="0" tIns="0" rIns="0" bIns="0" anchor="t"/>
+          <a:lstStyle xmlns:a="http://schemas.openxmlformats.org/drawingml/2006/main"/>
+          <a:p xmlns:a="http://schemas.openxmlformats.org/drawingml/2006/main">
+            <a:r>
+              <a:rPr lang="en-US" sz="1125" b="1">
                 <a:solidFill>
                   <a:srgbClr val="4C9DD8"/>
                 </a:solidFill>
                 <a:latin typeface="Arial"/>
                 <a:ea typeface="Arial"/>
               </a:rPr>
-              <a:t>SKYLINE WAYFINDING · VISUAL CARRIER</a:t>
-            </a:r>
-            <a:endParaRPr lang="en-US"/>
-          </a:p>
-        </p:txBody>
-      </p:sp>
-      <p:sp>
-        <p:nvSpPr>
-          <p:cNvPr id="5" name="visual-title"/>
-          <p:cNvSpPr txBox="1"/>
-          <p:nvPr/>
-        </p:nvSpPr>
-        <p:spPr>
-          <a:xfrm xmlns:a="http://schemas.openxmlformats.org/drawingml/2006/main">
-            <a:off x="914400" y="1314450"/>
-            <a:ext cx="11811000" cy="552450"/>
-          </a:xfrm>
-          <a:prstGeom xmlns:a="http://schemas.openxmlformats.org/drawingml/2006/main" prst="rect">
-            <a:avLst/>
-          </a:prstGeom>
-          <a:noFill xmlns:a="http://schemas.openxmlformats.org/drawingml/2006/main"/>
-          <a:ln xmlns:a="http://schemas.openxmlformats.org/drawingml/2006/main" w="0">
-            <a:noFill/>
-          </a:ln>
-        </p:spPr>
-        <p:txBody>
-          <a:bodyPr xmlns:a="http://schemas.openxmlformats.org/drawingml/2006/main" wrap="square" lIns="0" tIns="0" rIns="0" bIns="0" anchor="t"/>
-          <a:lstStyle xmlns:a="http://schemas.openxmlformats.org/drawingml/2006/main"/>
-          <a:p xmlns:a="http://schemas.openxmlformats.org/drawingml/2006/main">
-            <a:r>
-              <a:rPr lang="en-US" sz="2850" b="1">
+              <a:t>ONE IMAGE · ONE THESIS · ONE TURN</a:t>
+            </a:r>
+            <a:endParaRPr lang="en-US"/>
+          </a:p>
+        </p:txBody>
+      </p:sp>
+      <p:sp>
+        <p:nvSpPr>
+          <p:cNvPr id="8" name="section-next"/>
+          <p:cNvSpPr txBox="1"/>
+          <p:nvPr/>
+        </p:nvSpPr>
+        <p:spPr>
+          <a:xfrm xmlns:a="http://schemas.openxmlformats.org/drawingml/2006/main">
+            <a:off x="914400" y="5772150"/>
+            <a:ext cx="5334000" cy="476250"/>
+          </a:xfrm>
+          <a:prstGeom xmlns:a="http://schemas.openxmlformats.org/drawingml/2006/main" prst="rect">
+            <a:avLst/>
+          </a:prstGeom>
+          <a:noFill xmlns:a="http://schemas.openxmlformats.org/drawingml/2006/main"/>
+          <a:ln xmlns:a="http://schemas.openxmlformats.org/drawingml/2006/main" w="0">
+            <a:noFill/>
+          </a:ln>
+        </p:spPr>
+        <p:txBody>
+          <a:bodyPr xmlns:a="http://schemas.openxmlformats.org/drawingml/2006/main" wrap="square" lIns="0" tIns="0" rIns="0" bIns="0" anchor="t"/>
+          <a:lstStyle xmlns:a="http://schemas.openxmlformats.org/drawingml/2006/main"/>
+          <a:p xmlns:a="http://schemas.openxmlformats.org/drawingml/2006/main">
+            <a:r>
+              <a:rPr lang="en-US" sz="2100" b="1">
                 <a:solidFill>
                   <a:srgbClr val="162A4A"/>
                 </a:solidFill>
                 <a:latin typeface="Arial"/>
                 <a:ea typeface="Arial"/>
               </a:rPr>
-              <a:t>Show the operating shape</a:t>
-            </a:r>
-            <a:endParaRPr lang="en-US"/>
-          </a:p>
-        </p:txBody>
-      </p:sp>
-      <p:sp>
-        <p:nvSpPr>
-          <p:cNvPr id="6" name="visual-body"/>
-          <p:cNvSpPr txBox="1"/>
-          <p:nvPr/>
-        </p:nvSpPr>
-        <p:spPr>
-          <a:xfrm xmlns:a="http://schemas.openxmlformats.org/drawingml/2006/main">
-            <a:off x="952500" y="1981200"/>
-            <a:ext cx="10477500" cy="266700"/>
-          </a:xfrm>
-          <a:prstGeom xmlns:a="http://schemas.openxmlformats.org/drawingml/2006/main" prst="rect">
-            <a:avLst/>
-          </a:prstGeom>
-          <a:noFill xmlns:a="http://schemas.openxmlformats.org/drawingml/2006/main"/>
-          <a:ln xmlns:a="http://schemas.openxmlformats.org/drawingml/2006/main" w="0">
-            <a:noFill/>
-          </a:ln>
-        </p:spPr>
-        <p:txBody>
-          <a:bodyPr xmlns:a="http://schemas.openxmlformats.org/drawingml/2006/main" wrap="square" lIns="0" tIns="0" rIns="0" bIns="0" anchor="t"/>
-          <a:lstStyle xmlns:a="http://schemas.openxmlformats.org/drawingml/2006/main"/>
-          <a:p xmlns:a="http://schemas.openxmlformats.org/drawingml/2006/main">
-            <a:r>
-              <a:rPr lang="en-US" sz="1350">
-                <a:solidFill>
-                  <a:srgbClr val="8C96A7"/>
-                </a:solidFill>
-                <a:latin typeface="Arial"/>
-                <a:ea typeface="Arial"/>
-              </a:rPr>
-              <a:t>An operating page should reveal the shape of the work, not decorate the status.</a:t>
-            </a:r>
-            <a:endParaRPr lang="en-US"/>
-          </a:p>
-        </p:txBody>
-      </p:sp>
-      <p:sp>
-        <p:nvSpPr>
-          <p:cNvPr id="7" name="visual-rule"/>
-          <p:cNvSpPr/>
-          <p:nvPr/>
-        </p:nvSpPr>
-        <p:spPr>
-          <a:xfrm xmlns:a="http://schemas.openxmlformats.org/drawingml/2006/main">
-            <a:off x="914400" y="2457450"/>
-            <a:ext cx="13411200" cy="0"/>
-          </a:xfrm>
-          <a:prstGeom xmlns:a="http://schemas.openxmlformats.org/drawingml/2006/main" prst="line">
-            <a:avLst/>
-          </a:prstGeom>
-          <a:noFill xmlns:a="http://schemas.openxmlformats.org/drawingml/2006/main"/>
-          <a:ln xmlns:a="http://schemas.openxmlformats.org/drawingml/2006/main" w="25400">
-            <a:solidFill>
-              <a:srgbClr val="8C96A7"/>
-            </a:solidFill>
-            <a:prstDash val="solid"/>
-          </a:ln>
-        </p:spPr>
-        <p:txBody>
-          <a:bodyPr xmlns:a="http://schemas.openxmlformats.org/drawingml/2006/main" wrap="square" lIns="0" tIns="0" rIns="0" bIns="0" anchor="t"/>
-          <a:lstStyle xmlns:a="http://schemas.openxmlformats.org/drawingml/2006/main"/>
-          <a:p xmlns:a="http://schemas.openxmlformats.org/drawingml/2006/main">
-            <a:r>
-              <a:rPr lang="en-US"/>
-              <a:t/>
-            </a:r>
-            <a:endParaRPr lang="en-US"/>
-          </a:p>
-        </p:txBody>
-      </p:sp>
-      <p:graphicFrame>
-        <p:nvGraphicFramePr>
-          <p:cNvPr id="8" name="dense-visual-bars"/>
-          <p:cNvGraphicFramePr>
-            <a:graphicFrameLocks xmlns:a="http://schemas.openxmlformats.org/drawingml/2006/main" noGrp="1"/>
-          </p:cNvGraphicFramePr>
-          <p:nvPr/>
-        </p:nvGraphicFramePr>
-        <p:xfrm>
-          <a:off xmlns:a="http://schemas.openxmlformats.org/drawingml/2006/main" x="914400" y="3028950"/>
-          <a:ext xmlns:a="http://schemas.openxmlformats.org/drawingml/2006/main" cx="5334000" cy="3143250"/>
-        </p:xfrm>
-        <a:graphic xmlns:a="http://schemas.openxmlformats.org/drawingml/2006/main">
-          <a:graphicData uri="http://schemas.openxmlformats.org/drawingml/2006/chart">
-            <c:chart xmlns:r="http://schemas.openxmlformats.org/officeDocument/2006/relationships" xmlns:c="http://schemas.openxmlformats.org/drawingml/2006/chart" r:id="R8d368eceb8f94da1"/>
-          </a:graphicData>
-        </a:graphic>
-      </p:graphicFrame>
-      <p:graphicFrame>
-        <p:nvGraphicFramePr>
-          <p:cNvPr id="9" name="dense-visual-line"/>
-          <p:cNvGraphicFramePr>
-            <a:graphicFrameLocks xmlns:a="http://schemas.openxmlformats.org/drawingml/2006/main" noGrp="1"/>
-          </p:cNvGraphicFramePr>
-          <p:nvPr/>
-        </p:nvGraphicFramePr>
-        <p:xfrm>
-          <a:off xmlns:a="http://schemas.openxmlformats.org/drawingml/2006/main" x="6667500" y="3028950"/>
-          <a:ext xmlns:a="http://schemas.openxmlformats.org/drawingml/2006/main" cx="3810000" cy="3143250"/>
-        </p:xfrm>
-        <a:graphic xmlns:a="http://schemas.openxmlformats.org/drawingml/2006/main">
-          <a:graphicData uri="http://schemas.openxmlformats.org/drawingml/2006/chart">
-            <c:chart xmlns:r="http://schemas.openxmlformats.org/officeDocument/2006/relationships" xmlns:c="http://schemas.openxmlformats.org/drawingml/2006/chart" r:id="R3938096fc3d241da"/>
-          </a:graphicData>
-        </a:graphic>
-      </p:graphicFrame>
-      <p:sp>
-        <p:nvSpPr>
-          <p:cNvPr id="10" name="visual-note"/>
-          <p:cNvSpPr/>
-          <p:nvPr/>
-        </p:nvSpPr>
-        <p:spPr>
-          <a:xfrm xmlns:a="http://schemas.openxmlformats.org/drawingml/2006/main">
-            <a:off x="11049000" y="3333750"/>
-            <a:ext cx="3048000" cy="2381250"/>
-          </a:xfrm>
-          <a:prstGeom xmlns:a="http://schemas.openxmlformats.org/drawingml/2006/main" prst="rect">
-            <a:avLst/>
-          </a:prstGeom>
-          <a:solidFill xmlns:a="http://schemas.openxmlformats.org/drawingml/2006/main">
-            <a:srgbClr val="F3F5F8"/>
-          </a:solidFill>
-          <a:ln xmlns:a="http://schemas.openxmlformats.org/drawingml/2006/main" w="12700">
-            <a:solidFill>
-              <a:srgbClr val="8C96A7"/>
-            </a:solidFill>
-            <a:prstDash val="solid"/>
-          </a:ln>
-        </p:spPr>
-        <p:txBody>
-          <a:bodyPr xmlns:a="http://schemas.openxmlformats.org/drawingml/2006/main" wrap="square" lIns="0" tIns="0" rIns="0" bIns="0" anchor="t"/>
-          <a:lstStyle xmlns:a="http://schemas.openxmlformats.org/drawingml/2006/main"/>
-          <a:p xmlns:a="http://schemas.openxmlformats.org/drawingml/2006/main">
-            <a:r>
-              <a:rPr lang="en-US"/>
-              <a:t/>
-            </a:r>
-            <a:endParaRPr lang="en-US"/>
-          </a:p>
-        </p:txBody>
-      </p:sp>
-      <p:sp>
-        <p:nvSpPr>
-          <p:cNvPr id="11" name="visual-note-label"/>
-          <p:cNvSpPr txBox="1"/>
-          <p:nvPr/>
-        </p:nvSpPr>
-        <p:spPr>
-          <a:xfrm xmlns:a="http://schemas.openxmlformats.org/drawingml/2006/main">
-            <a:off x="11430000" y="3695700"/>
-            <a:ext cx="2286000" cy="228600"/>
-          </a:xfrm>
-          <a:prstGeom xmlns:a="http://schemas.openxmlformats.org/drawingml/2006/main" prst="rect">
-            <a:avLst/>
-          </a:prstGeom>
-          <a:noFill xmlns:a="http://schemas.openxmlformats.org/drawingml/2006/main"/>
-          <a:ln xmlns:a="http://schemas.openxmlformats.org/drawingml/2006/main" w="0">
-            <a:noFill/>
-          </a:ln>
-        </p:spPr>
-        <p:txBody>
-          <a:bodyPr xmlns:a="http://schemas.openxmlformats.org/drawingml/2006/main" wrap="square" lIns="0" tIns="0" rIns="0" bIns="0" anchor="t"/>
-          <a:lstStyle xmlns:a="http://schemas.openxmlformats.org/drawingml/2006/main"/>
-          <a:p xmlns:a="http://schemas.openxmlformats.org/drawingml/2006/main">
-            <a:r>
-              <a:rPr lang="en-US" sz="1125" b="1">
-                <a:solidFill>
-                  <a:srgbClr val="4C9DD8"/>
-                </a:solidFill>
-                <a:latin typeface="Arial"/>
-                <a:ea typeface="Arial"/>
-              </a:rPr>
-              <a:t>CARRIER</a:t>
-            </a:r>
-            <a:endParaRPr lang="en-US"/>
-          </a:p>
-        </p:txBody>
-      </p:sp>
-      <p:sp>
-        <p:nvSpPr>
-          <p:cNvPr id="12" name="visual-note-text"/>
-          <p:cNvSpPr txBox="1"/>
-          <p:nvPr/>
-        </p:nvSpPr>
-        <p:spPr>
-          <a:xfrm xmlns:a="http://schemas.openxmlformats.org/drawingml/2006/main">
-            <a:off x="11430000" y="4171950"/>
-            <a:ext cx="2286000" cy="723900"/>
-          </a:xfrm>
-          <a:prstGeom xmlns:a="http://schemas.openxmlformats.org/drawingml/2006/main" prst="rect">
-            <a:avLst/>
-          </a:prstGeom>
-          <a:noFill xmlns:a="http://schemas.openxmlformats.org/drawingml/2006/main"/>
-          <a:ln xmlns:a="http://schemas.openxmlformats.org/drawingml/2006/main" w="0">
-            <a:noFill/>
-          </a:ln>
-        </p:spPr>
-        <p:txBody>
-          <a:bodyPr xmlns:a="http://schemas.openxmlformats.org/drawingml/2006/main" wrap="square" lIns="0" tIns="0" rIns="0" bIns="0" anchor="t"/>
-          <a:lstStyle xmlns:a="http://schemas.openxmlformats.org/drawingml/2006/main"/>
-          <a:p xmlns:a="http://schemas.openxmlformats.org/drawingml/2006/main">
-            <a:r>
-              <a:rPr lang="en-US" sz="2100" b="1">
-                <a:solidFill>
-                  <a:srgbClr val="162A4A"/>
-                </a:solidFill>
-                <a:latin typeface="Arial"/>
-                <a:ea typeface="Arial"/>
-              </a:rPr>
-              <a:t>Exception before polish</a:t>
-            </a:r>
-            <a:endParaRPr lang="en-US"/>
-          </a:p>
-        </p:txBody>
-      </p:sp>
-      <p:sp>
-        <p:nvSpPr>
-          <p:cNvPr id="13" name="visual-note-foot"/>
-          <p:cNvSpPr txBox="1"/>
-          <p:nvPr/>
-        </p:nvSpPr>
-        <p:spPr>
-          <a:xfrm xmlns:a="http://schemas.openxmlformats.org/drawingml/2006/main">
-            <a:off x="11430000" y="5219700"/>
-            <a:ext cx="2286000" cy="457200"/>
-          </a:xfrm>
-          <a:prstGeom xmlns:a="http://schemas.openxmlformats.org/drawingml/2006/main" prst="rect">
-            <a:avLst/>
-          </a:prstGeom>
-          <a:noFill xmlns:a="http://schemas.openxmlformats.org/drawingml/2006/main"/>
-          <a:ln xmlns:a="http://schemas.openxmlformats.org/drawingml/2006/main" w="0">
-            <a:noFill/>
-          </a:ln>
-        </p:spPr>
-        <p:txBody>
-          <a:bodyPr xmlns:a="http://schemas.openxmlformats.org/drawingml/2006/main" wrap="square" lIns="0" tIns="0" rIns="0" bIns="0" anchor="t"/>
-          <a:lstStyle xmlns:a="http://schemas.openxmlformats.org/drawingml/2006/main"/>
-          <a:p xmlns:a="http://schemas.openxmlformats.org/drawingml/2006/main">
-            <a:r>
-              <a:rPr lang="en-US" sz="1200">
-                <a:solidFill>
-                  <a:srgbClr val="8C96A7"/>
-                </a:solidFill>
-                <a:latin typeface="Arial"/>
-                <a:ea typeface="Arial"/>
-              </a:rPr>
-              <a:t>Read the mark, unit, and basis.</a:t>
-            </a:r>
-            <a:endParaRPr lang="en-US"/>
-          </a:p>
-        </p:txBody>
-      </p:sp>
-      <p:sp>
-        <p:nvSpPr>
-          <p:cNvPr id="14" name="source"/>
+              <a:t>Assign the handoff</a:t>
+            </a:r>
+            <a:endParaRPr lang="en-US"/>
+          </a:p>
+        </p:txBody>
+      </p:sp>
+      <p:sp>
+        <p:nvSpPr>
+          <p:cNvPr id="9" name="source"/>
           <p:cNvSpPr txBox="1"/>
           <p:nvPr/>
         </p:nvSpPr>
@@ -4245,7 +3893,7 @@
       </p:sp>
       <p:sp>
         <p:nvSpPr>
-          <p:cNvPr id="15" name="page-number"/>
+          <p:cNvPr id="10" name="page-number"/>
           <p:cNvSpPr txBox="1"/>
           <p:nvPr/>
         </p:nvSpPr>

--- a/skills/presentation-template-library/skills/artifact-template-skyline-wayfinding/assets/reference.pptx
+++ b/skills/presentation-template-library/skills/artifact-template-skyline-wayfinding/assets/reference.pptx
@@ -484,7 +484,7 @@
     <p:bg>
       <p:bgPr>
         <a:blipFill xmlns:a="http://schemas.openxmlformats.org/drawingml/2006/main">
-          <a:blip xmlns:r="http://schemas.openxmlformats.org/officeDocument/2006/relationships" r:embed="rIdOfficeKitImaged71bfa074cda59bb_1"/>
+          <a:blip xmlns:r="http://schemas.openxmlformats.org/officeDocument/2006/relationships" r:embed="rIdOfficeKitImagec237998db8bee20d_1"/>
           <a:stretch>
             <a:fillRect/>
           </a:stretch>
@@ -2312,7 +2312,7 @@
         </p:xfrm>
         <a:graphic xmlns:a="http://schemas.openxmlformats.org/drawingml/2006/main">
           <a:graphicData uri="http://schemas.openxmlformats.org/drawingml/2006/chart">
-            <c:chart xmlns:r="http://schemas.openxmlformats.org/officeDocument/2006/relationships" xmlns:c="http://schemas.openxmlformats.org/drawingml/2006/chart" r:id="Rbf733aa70cd14dee"/>
+            <c:chart xmlns:r="http://schemas.openxmlformats.org/officeDocument/2006/relationships" xmlns:c="http://schemas.openxmlformats.org/drawingml/2006/chart" r:id="R843fa7e412ad41cd"/>
           </a:graphicData>
         </a:graphic>
       </p:graphicFrame>
@@ -2330,7 +2330,7 @@
         </p:xfrm>
         <a:graphic xmlns:a="http://schemas.openxmlformats.org/drawingml/2006/main">
           <a:graphicData uri="http://schemas.openxmlformats.org/drawingml/2006/chart">
-            <c:chart xmlns:r="http://schemas.openxmlformats.org/officeDocument/2006/relationships" xmlns:c="http://schemas.openxmlformats.org/drawingml/2006/chart" r:id="R38436ff0be83469c"/>
+            <c:chart xmlns:r="http://schemas.openxmlformats.org/officeDocument/2006/relationships" xmlns:c="http://schemas.openxmlformats.org/drawingml/2006/chart" r:id="R37148c46e3534d3a"/>
           </a:graphicData>
         </a:graphic>
       </p:graphicFrame>
@@ -3576,7 +3576,7 @@
     <p:bg>
       <p:bgPr>
         <a:blipFill xmlns:a="http://schemas.openxmlformats.org/drawingml/2006/main">
-          <a:blip xmlns:r="http://schemas.openxmlformats.org/officeDocument/2006/relationships" r:embed="rIdOfficeKitImage33b8c33a8fc3d613_1"/>
+          <a:blip xmlns:r="http://schemas.openxmlformats.org/officeDocument/2006/relationships" r:embed="rIdOfficeKitImage7650495d0c3b8602_1"/>
           <a:stretch>
             <a:fillRect/>
           </a:stretch>

--- a/skills/presentation-template-library/skills/artifact-template-skyline-wayfinding/assets/reference.pptx
+++ b/skills/presentation-template-library/skills/artifact-template-skyline-wayfinding/assets/reference.pptx
@@ -2312,7 +2312,7 @@
         </p:xfrm>
         <a:graphic xmlns:a="http://schemas.openxmlformats.org/drawingml/2006/main">
           <a:graphicData uri="http://schemas.openxmlformats.org/drawingml/2006/chart">
-            <c:chart xmlns:r="http://schemas.openxmlformats.org/officeDocument/2006/relationships" xmlns:c="http://schemas.openxmlformats.org/drawingml/2006/chart" r:id="R843fa7e412ad41cd"/>
+            <c:chart xmlns:r="http://schemas.openxmlformats.org/officeDocument/2006/relationships" xmlns:c="http://schemas.openxmlformats.org/drawingml/2006/chart" r:id="R8e1ba43ae0e34adc"/>
           </a:graphicData>
         </a:graphic>
       </p:graphicFrame>
@@ -2330,7 +2330,7 @@
         </p:xfrm>
         <a:graphic xmlns:a="http://schemas.openxmlformats.org/drawingml/2006/main">
           <a:graphicData uri="http://schemas.openxmlformats.org/drawingml/2006/chart">
-            <c:chart xmlns:r="http://schemas.openxmlformats.org/officeDocument/2006/relationships" xmlns:c="http://schemas.openxmlformats.org/drawingml/2006/chart" r:id="R37148c46e3534d3a"/>
+            <c:chart xmlns:r="http://schemas.openxmlformats.org/officeDocument/2006/relationships" xmlns:c="http://schemas.openxmlformats.org/drawingml/2006/chart" r:id="R9c9f0862d3494813"/>
           </a:graphicData>
         </a:graphic>
       </p:graphicFrame>

--- a/skills/presentation-template-library/skills/artifact-template-skyline-wayfinding/assets/reference.pptx
+++ b/skills/presentation-template-library/skills/artifact-template-skyline-wayfinding/assets/reference.pptx
@@ -484,7 +484,7 @@
     <p:bg>
       <p:bgPr>
         <a:blipFill xmlns:a="http://schemas.openxmlformats.org/drawingml/2006/main">
-          <a:blip xmlns:r="http://schemas.openxmlformats.org/officeDocument/2006/relationships" r:embed="rIdOfficeKitImagec237998db8bee20d_1"/>
+          <a:blip xmlns:r="http://schemas.openxmlformats.org/officeDocument/2006/relationships" r:embed="rIdOfficeKitImagecb4e39f1eccfa545_1"/>
           <a:stretch>
             <a:fillRect/>
           </a:stretch>
@@ -2312,7 +2312,7 @@
         </p:xfrm>
         <a:graphic xmlns:a="http://schemas.openxmlformats.org/drawingml/2006/main">
           <a:graphicData uri="http://schemas.openxmlformats.org/drawingml/2006/chart">
-            <c:chart xmlns:r="http://schemas.openxmlformats.org/officeDocument/2006/relationships" xmlns:c="http://schemas.openxmlformats.org/drawingml/2006/chart" r:id="R8e1ba43ae0e34adc"/>
+            <c:chart xmlns:r="http://schemas.openxmlformats.org/officeDocument/2006/relationships" xmlns:c="http://schemas.openxmlformats.org/drawingml/2006/chart" r:id="R267f7f1357004a2a"/>
           </a:graphicData>
         </a:graphic>
       </p:graphicFrame>
@@ -2330,7 +2330,7 @@
         </p:xfrm>
         <a:graphic xmlns:a="http://schemas.openxmlformats.org/drawingml/2006/main">
           <a:graphicData uri="http://schemas.openxmlformats.org/drawingml/2006/chart">
-            <c:chart xmlns:r="http://schemas.openxmlformats.org/officeDocument/2006/relationships" xmlns:c="http://schemas.openxmlformats.org/drawingml/2006/chart" r:id="R9c9f0862d3494813"/>
+            <c:chart xmlns:r="http://schemas.openxmlformats.org/officeDocument/2006/relationships" xmlns:c="http://schemas.openxmlformats.org/drawingml/2006/chart" r:id="Rf1d828cc3b5846ee"/>
           </a:graphicData>
         </a:graphic>
       </p:graphicFrame>
@@ -3576,7 +3576,7 @@
     <p:bg>
       <p:bgPr>
         <a:blipFill xmlns:a="http://schemas.openxmlformats.org/drawingml/2006/main">
-          <a:blip xmlns:r="http://schemas.openxmlformats.org/officeDocument/2006/relationships" r:embed="rIdOfficeKitImage7650495d0c3b8602_1"/>
+          <a:blip xmlns:r="http://schemas.openxmlformats.org/officeDocument/2006/relationships" r:embed="rIdOfficeKitImage4df9c6298f17ef7a_1"/>
           <a:stretch>
             <a:fillRect/>
           </a:stretch>

--- a/skills/presentation-template-library/skills/artifact-template-skyline-wayfinding/assets/reference.pptx
+++ b/skills/presentation-template-library/skills/artifact-template-skyline-wayfinding/assets/reference.pptx
@@ -484,7 +484,7 @@
     <p:bg>
       <p:bgPr>
         <a:blipFill xmlns:a="http://schemas.openxmlformats.org/drawingml/2006/main">
-          <a:blip xmlns:r="http://schemas.openxmlformats.org/officeDocument/2006/relationships" r:embed="rIdOfficeKitImagecb4e39f1eccfa545_1"/>
+          <a:blip xmlns:r="http://schemas.openxmlformats.org/officeDocument/2006/relationships" r:embed="rIdOfficeKitImageff039bf2f181c5d1_1"/>
           <a:stretch>
             <a:fillRect/>
           </a:stretch>
@@ -2312,7 +2312,7 @@
         </p:xfrm>
         <a:graphic xmlns:a="http://schemas.openxmlformats.org/drawingml/2006/main">
           <a:graphicData uri="http://schemas.openxmlformats.org/drawingml/2006/chart">
-            <c:chart xmlns:r="http://schemas.openxmlformats.org/officeDocument/2006/relationships" xmlns:c="http://schemas.openxmlformats.org/drawingml/2006/chart" r:id="R267f7f1357004a2a"/>
+            <c:chart xmlns:r="http://schemas.openxmlformats.org/officeDocument/2006/relationships" xmlns:c="http://schemas.openxmlformats.org/drawingml/2006/chart" r:id="R52d57df6db3b44f0"/>
           </a:graphicData>
         </a:graphic>
       </p:graphicFrame>
@@ -2330,7 +2330,7 @@
         </p:xfrm>
         <a:graphic xmlns:a="http://schemas.openxmlformats.org/drawingml/2006/main">
           <a:graphicData uri="http://schemas.openxmlformats.org/drawingml/2006/chart">
-            <c:chart xmlns:r="http://schemas.openxmlformats.org/officeDocument/2006/relationships" xmlns:c="http://schemas.openxmlformats.org/drawingml/2006/chart" r:id="Rf1d828cc3b5846ee"/>
+            <c:chart xmlns:r="http://schemas.openxmlformats.org/officeDocument/2006/relationships" xmlns:c="http://schemas.openxmlformats.org/drawingml/2006/chart" r:id="R11478c1a121c48f8"/>
           </a:graphicData>
         </a:graphic>
       </p:graphicFrame>
@@ -3576,7 +3576,7 @@
     <p:bg>
       <p:bgPr>
         <a:blipFill xmlns:a="http://schemas.openxmlformats.org/drawingml/2006/main">
-          <a:blip xmlns:r="http://schemas.openxmlformats.org/officeDocument/2006/relationships" r:embed="rIdOfficeKitImage4df9c6298f17ef7a_1"/>
+          <a:blip xmlns:r="http://schemas.openxmlformats.org/officeDocument/2006/relationships" r:embed="rIdOfficeKitImagecb4e39f1eccfa545_1"/>
           <a:stretch>
             <a:fillRect/>
           </a:stretch>
